--- a/Introduction_workshop.pptx
+++ b/Introduction_workshop.pptx
@@ -5,15 +5,16 @@
     <p:sldMasterId id="2147483648" r:id="rId1"/>
   </p:sldMasterIdLst>
   <p:notesMasterIdLst>
-    <p:notesMasterId r:id="rId5"/>
+    <p:notesMasterId r:id="rId6"/>
   </p:notesMasterIdLst>
   <p:handoutMasterIdLst>
-    <p:handoutMasterId r:id="rId6"/>
+    <p:handoutMasterId r:id="rId7"/>
   </p:handoutMasterIdLst>
   <p:sldIdLst>
     <p:sldId id="337" r:id="rId2"/>
     <p:sldId id="341" r:id="rId3"/>
     <p:sldId id="296" r:id="rId4"/>
+    <p:sldId id="342" r:id="rId5"/>
   </p:sldIdLst>
   <p:sldSz cx="12192000" cy="6858000"/>
   <p:notesSz cx="6858000" cy="9144000"/>
@@ -896,6 +897,114 @@
     <p:extLst>
       <p:ext uri="{BB962C8B-B14F-4D97-AF65-F5344CB8AC3E}">
         <p14:creationId xmlns:p14="http://schemas.microsoft.com/office/powerpoint/2010/main" val="3016730946"/>
+      </p:ext>
+    </p:extLst>
+  </p:cSld>
+  <p:clrMapOvr>
+    <a:masterClrMapping/>
+  </p:clrMapOvr>
+</p:notes>
+</file>
+
+<file path=ppt/notesSlides/notesSlide3.xml><?xml version="1.0" encoding="utf-8"?>
+<p:notes xmlns:a="http://schemas.openxmlformats.org/drawingml/2006/main" xmlns:r="http://schemas.openxmlformats.org/officeDocument/2006/relationships" xmlns:p="http://schemas.openxmlformats.org/presentationml/2006/main">
+  <p:cSld>
+    <p:spTree>
+      <p:nvGrpSpPr>
+        <p:cNvPr id="1" name="">
+          <a:extLst>
+            <a:ext uri="{FF2B5EF4-FFF2-40B4-BE49-F238E27FC236}">
+              <a16:creationId xmlns:a16="http://schemas.microsoft.com/office/drawing/2014/main" id="{C3BF580C-2065-5131-2DCC-D65DAB58D574}"/>
+            </a:ext>
+          </a:extLst>
+        </p:cNvPr>
+        <p:cNvGrpSpPr/>
+        <p:nvPr/>
+      </p:nvGrpSpPr>
+      <p:grpSpPr>
+        <a:xfrm>
+          <a:off x="0" y="0"/>
+          <a:ext cx="0" cy="0"/>
+          <a:chOff x="0" y="0"/>
+          <a:chExt cx="0" cy="0"/>
+        </a:xfrm>
+      </p:grpSpPr>
+      <p:sp>
+        <p:nvSpPr>
+          <p:cNvPr id="2" name="Slide Image Placeholder 1">
+            <a:extLst>
+              <a:ext uri="{FF2B5EF4-FFF2-40B4-BE49-F238E27FC236}">
+                <a16:creationId xmlns:a16="http://schemas.microsoft.com/office/drawing/2014/main" id="{16559545-F299-445F-D10B-45FFF0C41938}"/>
+              </a:ext>
+            </a:extLst>
+          </p:cNvPr>
+          <p:cNvSpPr>
+            <a:spLocks noGrp="1" noRot="1" noChangeAspect="1"/>
+          </p:cNvSpPr>
+          <p:nvPr>
+            <p:ph type="sldImg"/>
+          </p:nvPr>
+        </p:nvSpPr>
+        <p:spPr/>
+      </p:sp>
+      <p:sp>
+        <p:nvSpPr>
+          <p:cNvPr id="3" name="Notes Placeholder 2">
+            <a:extLst>
+              <a:ext uri="{FF2B5EF4-FFF2-40B4-BE49-F238E27FC236}">
+                <a16:creationId xmlns:a16="http://schemas.microsoft.com/office/drawing/2014/main" id="{AE4B77F1-FCBF-56DE-636C-1995C9C23DC7}"/>
+              </a:ext>
+            </a:extLst>
+          </p:cNvPr>
+          <p:cNvSpPr>
+            <a:spLocks noGrp="1"/>
+          </p:cNvSpPr>
+          <p:nvPr>
+            <p:ph type="body" idx="1"/>
+          </p:nvPr>
+        </p:nvSpPr>
+        <p:spPr/>
+        <p:txBody>
+          <a:bodyPr/>
+          <a:lstStyle/>
+          <a:p>
+            <a:endParaRPr lang="en-US" dirty="0"/>
+          </a:p>
+        </p:txBody>
+      </p:sp>
+      <p:sp>
+        <p:nvSpPr>
+          <p:cNvPr id="4" name="Slide Number Placeholder 3">
+            <a:extLst>
+              <a:ext uri="{FF2B5EF4-FFF2-40B4-BE49-F238E27FC236}">
+                <a16:creationId xmlns:a16="http://schemas.microsoft.com/office/drawing/2014/main" id="{BF5427A4-FA64-254C-E780-E5C272EF54CB}"/>
+              </a:ext>
+            </a:extLst>
+          </p:cNvPr>
+          <p:cNvSpPr>
+            <a:spLocks noGrp="1"/>
+          </p:cNvSpPr>
+          <p:nvPr>
+            <p:ph type="sldNum" sz="quarter" idx="5"/>
+          </p:nvPr>
+        </p:nvSpPr>
+        <p:spPr/>
+        <p:txBody>
+          <a:bodyPr/>
+          <a:lstStyle/>
+          <a:p>
+            <a:fld id="{DDF8A844-23A7-4B5F-83F0-8D751C8876D0}" type="slidenum">
+              <a:rPr lang="en-NZ" smtClean="0"/>
+              <a:t>4</a:t>
+            </a:fld>
+            <a:endParaRPr lang="en-NZ"/>
+          </a:p>
+        </p:txBody>
+      </p:sp>
+    </p:spTree>
+    <p:extLst>
+      <p:ext uri="{BB962C8B-B14F-4D97-AF65-F5344CB8AC3E}">
+        <p14:creationId xmlns:p14="http://schemas.microsoft.com/office/powerpoint/2010/main" val="3523819697"/>
       </p:ext>
     </p:extLst>
   </p:cSld>
@@ -5997,6 +6106,324 @@
     <p:extLst>
       <p:ext uri="{BB962C8B-B14F-4D97-AF65-F5344CB8AC3E}">
         <p14:creationId xmlns:p14="http://schemas.microsoft.com/office/powerpoint/2010/main" val="676034068"/>
+      </p:ext>
+    </p:extLst>
+  </p:cSld>
+  <p:clrMapOvr>
+    <a:masterClrMapping/>
+  </p:clrMapOvr>
+</p:sld>
+</file>
+
+<file path=ppt/slides/slide4.xml><?xml version="1.0" encoding="utf-8"?>
+<p:sld xmlns:a="http://schemas.openxmlformats.org/drawingml/2006/main" xmlns:r="http://schemas.openxmlformats.org/officeDocument/2006/relationships" xmlns:p="http://schemas.openxmlformats.org/presentationml/2006/main">
+  <p:cSld>
+    <p:spTree>
+      <p:nvGrpSpPr>
+        <p:cNvPr id="1" name="">
+          <a:extLst>
+            <a:ext uri="{FF2B5EF4-FFF2-40B4-BE49-F238E27FC236}">
+              <a16:creationId xmlns:a16="http://schemas.microsoft.com/office/drawing/2014/main" id="{6976C0DF-050F-0136-11CF-67C69F91D191}"/>
+            </a:ext>
+          </a:extLst>
+        </p:cNvPr>
+        <p:cNvGrpSpPr/>
+        <p:nvPr/>
+      </p:nvGrpSpPr>
+      <p:grpSpPr>
+        <a:xfrm>
+          <a:off x="0" y="0"/>
+          <a:ext cx="0" cy="0"/>
+          <a:chOff x="0" y="0"/>
+          <a:chExt cx="0" cy="0"/>
+        </a:xfrm>
+      </p:grpSpPr>
+      <p:sp>
+        <p:nvSpPr>
+          <p:cNvPr id="5" name="Slide Number Placeholder 4">
+            <a:extLst>
+              <a:ext uri="{FF2B5EF4-FFF2-40B4-BE49-F238E27FC236}">
+                <a16:creationId xmlns:a16="http://schemas.microsoft.com/office/drawing/2014/main" id="{970711BE-BFFC-02AD-8006-A7AEFF2C7B51}"/>
+              </a:ext>
+            </a:extLst>
+          </p:cNvPr>
+          <p:cNvSpPr>
+            <a:spLocks noGrp="1"/>
+          </p:cNvSpPr>
+          <p:nvPr>
+            <p:ph type="sldNum" sz="quarter" idx="12"/>
+          </p:nvPr>
+        </p:nvSpPr>
+        <p:spPr/>
+        <p:txBody>
+          <a:bodyPr/>
+          <a:lstStyle/>
+          <a:p>
+            <a:fld id="{367D4688-DB61-4FE8-989D-AD21859F3F87}" type="slidenum">
+              <a:rPr lang="en-NZ" smtClean="0"/>
+              <a:t>4</a:t>
+            </a:fld>
+            <a:endParaRPr lang="en-NZ" dirty="0"/>
+          </a:p>
+        </p:txBody>
+      </p:sp>
+      <p:pic>
+        <p:nvPicPr>
+          <p:cNvPr id="2" name="Picture 1">
+            <a:extLst>
+              <a:ext uri="{FF2B5EF4-FFF2-40B4-BE49-F238E27FC236}">
+                <a16:creationId xmlns:a16="http://schemas.microsoft.com/office/drawing/2014/main" id="{49C3F78C-949F-018F-F943-F51C1EA8AFCA}"/>
+              </a:ext>
+              <a:ext uri="{C183D7F6-B498-43B3-948B-1728B52AA6E4}">
+                <adec:decorative xmlns:adec="http://schemas.microsoft.com/office/drawing/2017/decorative" val="1"/>
+              </a:ext>
+            </a:extLst>
+          </p:cNvPr>
+          <p:cNvPicPr>
+            <a:picLocks noChangeAspect="1"/>
+          </p:cNvPicPr>
+          <p:nvPr/>
+        </p:nvPicPr>
+        <p:blipFill>
+          <a:blip r:embed="rId3"/>
+          <a:srcRect l="20657" t="9217" r="20880" b="7647"/>
+          <a:stretch>
+            <a:fillRect/>
+          </a:stretch>
+        </p:blipFill>
+        <p:spPr>
+          <a:xfrm>
+            <a:off x="3435724" y="1748118"/>
+            <a:ext cx="5298142" cy="4276166"/>
+          </a:xfrm>
+          <a:prstGeom prst="rect">
+            <a:avLst/>
+          </a:prstGeom>
+        </p:spPr>
+      </p:pic>
+      <p:sp>
+        <p:nvSpPr>
+          <p:cNvPr id="3" name="Content Placeholder 17">
+            <a:extLst>
+              <a:ext uri="{FF2B5EF4-FFF2-40B4-BE49-F238E27FC236}">
+                <a16:creationId xmlns:a16="http://schemas.microsoft.com/office/drawing/2014/main" id="{54043A58-EFE2-1E1F-42A4-DA36EF18808D}"/>
+              </a:ext>
+            </a:extLst>
+          </p:cNvPr>
+          <p:cNvSpPr txBox="1">
+            <a:spLocks/>
+          </p:cNvSpPr>
+          <p:nvPr/>
+        </p:nvSpPr>
+        <p:spPr>
+          <a:xfrm>
+            <a:off x="1280160" y="1171488"/>
+            <a:ext cx="10186626" cy="4515024"/>
+          </a:xfrm>
+          <a:prstGeom prst="rect">
+            <a:avLst/>
+          </a:prstGeom>
+        </p:spPr>
+        <p:txBody>
+          <a:bodyPr vert="horz" lIns="91440" tIns="45720" rIns="91440" bIns="45720" rtlCol="0">
+            <a:normAutofit/>
+          </a:bodyPr>
+          <a:lstStyle>
+            <a:lvl1pPr marL="228600" indent="-270000" algn="l" defTabSz="914400" rtl="0" eaLnBrk="1" latinLnBrk="0" hangingPunct="1">
+              <a:lnSpc>
+                <a:spcPct val="100000"/>
+              </a:lnSpc>
+              <a:spcBef>
+                <a:spcPts val="600"/>
+              </a:spcBef>
+              <a:buFont typeface="Arial" panose="020B0604020202020204" pitchFamily="34" charset="0"/>
+              <a:buChar char="•"/>
+              <a:defRPr sz="2400" kern="1200">
+                <a:solidFill>
+                  <a:srgbClr val="00467F"/>
+                </a:solidFill>
+                <a:latin typeface="Segoe UI" panose="020B0502040204020203" pitchFamily="34" charset="0"/>
+                <a:ea typeface="+mn-ea"/>
+                <a:cs typeface="Segoe UI" panose="020B0502040204020203" pitchFamily="34" charset="0"/>
+              </a:defRPr>
+            </a:lvl1pPr>
+            <a:lvl2pPr marL="685800" indent="-270000" algn="l" defTabSz="914400" rtl="0" eaLnBrk="1" latinLnBrk="0" hangingPunct="1">
+              <a:lnSpc>
+                <a:spcPct val="100000"/>
+              </a:lnSpc>
+              <a:spcBef>
+                <a:spcPts val="600"/>
+              </a:spcBef>
+              <a:buFont typeface="Arial" panose="020B0604020202020204" pitchFamily="34" charset="0"/>
+              <a:buChar char="•"/>
+              <a:defRPr sz="2000" kern="1200">
+                <a:solidFill>
+                  <a:srgbClr val="00467F"/>
+                </a:solidFill>
+                <a:latin typeface="Segoe UI" panose="020B0502040204020203" pitchFamily="34" charset="0"/>
+                <a:ea typeface="+mn-ea"/>
+                <a:cs typeface="Segoe UI" panose="020B0502040204020203" pitchFamily="34" charset="0"/>
+              </a:defRPr>
+            </a:lvl2pPr>
+            <a:lvl3pPr marL="1143000" indent="-270000" algn="l" defTabSz="914400" rtl="0" eaLnBrk="1" latinLnBrk="0" hangingPunct="1">
+              <a:lnSpc>
+                <a:spcPct val="100000"/>
+              </a:lnSpc>
+              <a:spcBef>
+                <a:spcPts val="600"/>
+              </a:spcBef>
+              <a:buFont typeface="Arial" panose="020B0604020202020204" pitchFamily="34" charset="0"/>
+              <a:buChar char="•"/>
+              <a:defRPr sz="1800" kern="1200">
+                <a:solidFill>
+                  <a:srgbClr val="00467F"/>
+                </a:solidFill>
+                <a:latin typeface="Segoe UI" panose="020B0502040204020203" pitchFamily="34" charset="0"/>
+                <a:ea typeface="+mn-ea"/>
+                <a:cs typeface="Segoe UI" panose="020B0502040204020203" pitchFamily="34" charset="0"/>
+              </a:defRPr>
+            </a:lvl3pPr>
+            <a:lvl4pPr marL="1600200" indent="-270000" algn="l" defTabSz="914400" rtl="0" eaLnBrk="1" latinLnBrk="0" hangingPunct="1">
+              <a:lnSpc>
+                <a:spcPct val="100000"/>
+              </a:lnSpc>
+              <a:spcBef>
+                <a:spcPts val="600"/>
+              </a:spcBef>
+              <a:buFont typeface="Arial" panose="020B0604020202020204" pitchFamily="34" charset="0"/>
+              <a:buChar char="•"/>
+              <a:defRPr sz="1600" kern="1200">
+                <a:solidFill>
+                  <a:srgbClr val="00467F"/>
+                </a:solidFill>
+                <a:latin typeface="Segoe UI" panose="020B0502040204020203" pitchFamily="34" charset="0"/>
+                <a:ea typeface="+mn-ea"/>
+                <a:cs typeface="Segoe UI" panose="020B0502040204020203" pitchFamily="34" charset="0"/>
+              </a:defRPr>
+            </a:lvl4pPr>
+            <a:lvl5pPr marL="2057400" indent="-270000" algn="l" defTabSz="914400" rtl="0" eaLnBrk="1" latinLnBrk="0" hangingPunct="1">
+              <a:lnSpc>
+                <a:spcPct val="100000"/>
+              </a:lnSpc>
+              <a:spcBef>
+                <a:spcPts val="600"/>
+              </a:spcBef>
+              <a:buFont typeface="Arial" panose="020B0604020202020204" pitchFamily="34" charset="0"/>
+              <a:buChar char="•"/>
+              <a:defRPr sz="1600" kern="1200">
+                <a:solidFill>
+                  <a:srgbClr val="00467F"/>
+                </a:solidFill>
+                <a:latin typeface="Segoe UI" panose="020B0502040204020203" pitchFamily="34" charset="0"/>
+                <a:ea typeface="+mn-ea"/>
+                <a:cs typeface="Segoe UI" panose="020B0502040204020203" pitchFamily="34" charset="0"/>
+              </a:defRPr>
+            </a:lvl5pPr>
+            <a:lvl6pPr marL="2514600" indent="-228600" algn="l" defTabSz="914400" rtl="0" eaLnBrk="1" latinLnBrk="0" hangingPunct="1">
+              <a:lnSpc>
+                <a:spcPct val="90000"/>
+              </a:lnSpc>
+              <a:spcBef>
+                <a:spcPts val="500"/>
+              </a:spcBef>
+              <a:buFont typeface="Arial" panose="020B0604020202020204" pitchFamily="34" charset="0"/>
+              <a:buChar char="•"/>
+              <a:defRPr sz="1800" kern="1200">
+                <a:solidFill>
+                  <a:schemeClr val="tx1"/>
+                </a:solidFill>
+                <a:latin typeface="+mn-lt"/>
+                <a:ea typeface="+mn-ea"/>
+                <a:cs typeface="+mn-cs"/>
+              </a:defRPr>
+            </a:lvl6pPr>
+            <a:lvl7pPr marL="2971800" indent="-228600" algn="l" defTabSz="914400" rtl="0" eaLnBrk="1" latinLnBrk="0" hangingPunct="1">
+              <a:lnSpc>
+                <a:spcPct val="90000"/>
+              </a:lnSpc>
+              <a:spcBef>
+                <a:spcPts val="500"/>
+              </a:spcBef>
+              <a:buFont typeface="Arial" panose="020B0604020202020204" pitchFamily="34" charset="0"/>
+              <a:buChar char="•"/>
+              <a:defRPr sz="1800" kern="1200">
+                <a:solidFill>
+                  <a:schemeClr val="tx1"/>
+                </a:solidFill>
+                <a:latin typeface="+mn-lt"/>
+                <a:ea typeface="+mn-ea"/>
+                <a:cs typeface="+mn-cs"/>
+              </a:defRPr>
+            </a:lvl7pPr>
+            <a:lvl8pPr marL="3429000" indent="-228600" algn="l" defTabSz="914400" rtl="0" eaLnBrk="1" latinLnBrk="0" hangingPunct="1">
+              <a:lnSpc>
+                <a:spcPct val="90000"/>
+              </a:lnSpc>
+              <a:spcBef>
+                <a:spcPts val="500"/>
+              </a:spcBef>
+              <a:buFont typeface="Arial" panose="020B0604020202020204" pitchFamily="34" charset="0"/>
+              <a:buChar char="•"/>
+              <a:defRPr sz="1800" kern="1200">
+                <a:solidFill>
+                  <a:schemeClr val="tx1"/>
+                </a:solidFill>
+                <a:latin typeface="+mn-lt"/>
+                <a:ea typeface="+mn-ea"/>
+                <a:cs typeface="+mn-cs"/>
+              </a:defRPr>
+            </a:lvl8pPr>
+            <a:lvl9pPr marL="3886200" indent="-228600" algn="l" defTabSz="914400" rtl="0" eaLnBrk="1" latinLnBrk="0" hangingPunct="1">
+              <a:lnSpc>
+                <a:spcPct val="90000"/>
+              </a:lnSpc>
+              <a:spcBef>
+                <a:spcPts val="500"/>
+              </a:spcBef>
+              <a:buFont typeface="Arial" panose="020B0604020202020204" pitchFamily="34" charset="0"/>
+              <a:buChar char="•"/>
+              <a:defRPr sz="1800" kern="1200">
+                <a:solidFill>
+                  <a:schemeClr val="tx1"/>
+                </a:solidFill>
+                <a:latin typeface="+mn-lt"/>
+                <a:ea typeface="+mn-ea"/>
+                <a:cs typeface="+mn-cs"/>
+              </a:defRPr>
+            </a:lvl9pPr>
+          </a:lstStyle>
+          <a:p>
+            <a:pPr marL="0" indent="0" algn="ctr">
+              <a:buNone/>
+            </a:pPr>
+            <a:r>
+              <a:rPr lang="en-NZ" dirty="0">
+                <a:solidFill>
+                  <a:schemeClr val="accent4"/>
+                </a:solidFill>
+              </a:rPr>
+              <a:t>Example </a:t>
+            </a:r>
+            <a:r>
+              <a:rPr lang="en-NZ">
+                <a:solidFill>
+                  <a:schemeClr val="accent4"/>
+                </a:solidFill>
+              </a:rPr>
+              <a:t>of final refinement</a:t>
+            </a:r>
+            <a:endParaRPr lang="en-NZ" dirty="0">
+              <a:solidFill>
+                <a:schemeClr val="accent4"/>
+              </a:solidFill>
+            </a:endParaRPr>
+          </a:p>
+        </p:txBody>
+      </p:sp>
+    </p:spTree>
+    <p:extLst>
+      <p:ext uri="{BB962C8B-B14F-4D97-AF65-F5344CB8AC3E}">
+        <p14:creationId xmlns:p14="http://schemas.microsoft.com/office/powerpoint/2010/main" val="542419604"/>
       </p:ext>
     </p:extLst>
   </p:cSld>
